--- a/packages/knowledge-seed/deliverable-shells/roadmap-v1.pptx
+++ b/packages/knowledge-seed/deliverable-shells/roadmap-v1.pptx
@@ -3061,10 +3061,6 @@
           <a:bodyPr wrap="square" lIns="0" tIns="0" rIns="0" bIns="0" rtlCol="0" anchor="ctr"/>
           <a:lstStyle/>
           <a:p>
-            <a:pPr marL="342900" indent="-342900">
-              <a:buSzPct val="100000"/>
-              <a:buChar char="•"/>
-            </a:pPr>
             <a:r>
               <a:rPr lang="en-US" sz="1400" dirty="0">
                 <a:solidFill>
@@ -3074,9 +3070,8 @@
                 <a:ea typeface="Calibri" pitchFamily="34" charset="-122"/>
                 <a:cs typeface="Calibri" pitchFamily="34" charset="-120"/>
               </a:rPr>
-              <a:t> </a:t>
-            </a:r>
-            <a:endParaRPr lang="en-US" sz="1400" dirty="0"/>
+              <a:t>{{section_phase_1_scope}}</a:t>
+            </a:r>
           </a:p>
         </p:txBody>
       </p:sp>
@@ -3920,10 +3915,6 @@
           <a:bodyPr wrap="square" lIns="0" tIns="0" rIns="0" bIns="0" rtlCol="0" anchor="ctr"/>
           <a:lstStyle/>
           <a:p>
-            <a:pPr marL="342900" indent="-342900">
-              <a:buSzPct val="100000"/>
-              <a:buChar char="•"/>
-            </a:pPr>
             <a:r>
               <a:rPr lang="en-US" sz="1400" dirty="0">
                 <a:solidFill>
@@ -3933,9 +3924,8 @@
                 <a:ea typeface="Calibri" pitchFamily="34" charset="-122"/>
                 <a:cs typeface="Calibri" pitchFamily="34" charset="-120"/>
               </a:rPr>
-              <a:t> </a:t>
-            </a:r>
-            <a:endParaRPr lang="en-US" sz="1400" dirty="0"/>
+              <a:t>{{section_phase_2_scope}}</a:t>
+            </a:r>
           </a:p>
         </p:txBody>
       </p:sp>
@@ -4779,10 +4769,6 @@
           <a:bodyPr wrap="square" lIns="0" tIns="0" rIns="0" bIns="0" rtlCol="0" anchor="ctr"/>
           <a:lstStyle/>
           <a:p>
-            <a:pPr marL="342900" indent="-342900">
-              <a:buSzPct val="100000"/>
-              <a:buChar char="•"/>
-            </a:pPr>
             <a:r>
               <a:rPr lang="en-US" sz="1400" dirty="0">
                 <a:solidFill>
@@ -4792,9 +4778,8 @@
                 <a:ea typeface="Calibri" pitchFamily="34" charset="-122"/>
                 <a:cs typeface="Calibri" pitchFamily="34" charset="-120"/>
               </a:rPr>
-              <a:t> </a:t>
-            </a:r>
-            <a:endParaRPr lang="en-US" sz="1400" dirty="0"/>
+              <a:t>{{section_phase_3_scope}}</a:t>
+            </a:r>
           </a:p>
         </p:txBody>
       </p:sp>
@@ -5555,9 +5540,6 @@
           <a:bodyPr wrap="square" lIns="0" tIns="0" rIns="0" bIns="0" rtlCol="0" anchor="ctr"/>
           <a:lstStyle/>
           <a:p>
-            <a:pPr indent="0" marL="0">
-              <a:buNone/>
-            </a:pPr>
             <a:r>
               <a:rPr lang="en-US" sz="1200" dirty="0">
                 <a:solidFill>
@@ -5567,9 +5549,8 @@
                 <a:ea typeface="Calibri" pitchFamily="34" charset="-122"/>
                 <a:cs typeface="Calibri" pitchFamily="34" charset="-120"/>
               </a:rPr>
-              <a:t>{{recommendations_bullets}}</a:t>
-            </a:r>
-            <a:endParaRPr lang="en-US" sz="1200" dirty="0"/>
+              <a:t>{{section_milestones_owners}}</a:t>
+            </a:r>
           </a:p>
         </p:txBody>
       </p:sp>

--- a/packages/knowledge-seed/deliverable-shells/roadmap-v1.pptx
+++ b/packages/knowledge-seed/deliverable-shells/roadmap-v1.pptx
@@ -1339,6 +1339,10 @@
           </a:solidFill>
           <a:ln/>
         </p:spPr>
+        <p:txBody>
+          <a:bodyPr/>
+          <a:p/>
+        </p:txBody>
       </p:sp>
       <p:sp>
         <p:nvSpPr>
@@ -1859,6 +1863,10 @@
           </a:solidFill>
           <a:ln/>
         </p:spPr>
+        <p:txBody>
+          <a:bodyPr/>
+          <a:p/>
+        </p:txBody>
       </p:sp>
       <p:sp>
         <p:nvSpPr>
@@ -2181,6 +2189,10 @@
           </a:solidFill>
           <a:ln/>
         </p:spPr>
+        <p:txBody>
+          <a:bodyPr/>
+          <a:p/>
+        </p:txBody>
       </p:sp>
       <p:sp>
         <p:nvSpPr>
@@ -2201,6 +2213,10 @@
           </a:solidFill>
           <a:ln/>
         </p:spPr>
+        <p:txBody>
+          <a:bodyPr/>
+          <a:p/>
+        </p:txBody>
       </p:sp>
       <p:sp>
         <p:nvSpPr>
@@ -2799,6 +2815,10 @@
           </a:solidFill>
           <a:ln/>
         </p:spPr>
+        <p:txBody>
+          <a:bodyPr/>
+          <a:p/>
+        </p:txBody>
       </p:sp>
       <p:sp>
         <p:nvSpPr>
@@ -2980,6 +3000,10 @@
             <a:prstDash val="solid"/>
           </a:ln>
         </p:spPr>
+        <p:txBody>
+          <a:bodyPr/>
+          <a:p/>
+        </p:txBody>
       </p:sp>
       <p:sp>
         <p:nvSpPr>
@@ -3000,6 +3024,10 @@
           </a:solidFill>
           <a:ln/>
         </p:spPr>
+        <p:txBody>
+          <a:bodyPr/>
+          <a:p/>
+        </p:txBody>
       </p:sp>
       <p:sp>
         <p:nvSpPr>
@@ -3058,7 +3086,9 @@
           <a:ln/>
         </p:spPr>
         <p:txBody>
-          <a:bodyPr wrap="square" lIns="0" tIns="0" rIns="0" bIns="0" rtlCol="0" anchor="ctr"/>
+          <a:bodyPr wrap="square" lIns="0" tIns="0" rIns="0" bIns="0" rtlCol="0" anchor="ctr">
+            <a:normAutofit/>
+          </a:bodyPr>
           <a:lstStyle/>
           <a:p>
             <a:r>
@@ -3094,6 +3124,10 @@
           </a:solidFill>
           <a:ln/>
         </p:spPr>
+        <p:txBody>
+          <a:bodyPr/>
+          <a:p/>
+        </p:txBody>
       </p:sp>
       <p:sp>
         <p:nvSpPr>
@@ -3653,6 +3687,10 @@
           </a:solidFill>
           <a:ln/>
         </p:spPr>
+        <p:txBody>
+          <a:bodyPr/>
+          <a:p/>
+        </p:txBody>
       </p:sp>
       <p:sp>
         <p:nvSpPr>
@@ -3834,6 +3872,10 @@
             <a:prstDash val="solid"/>
           </a:ln>
         </p:spPr>
+        <p:txBody>
+          <a:bodyPr/>
+          <a:p/>
+        </p:txBody>
       </p:sp>
       <p:sp>
         <p:nvSpPr>
@@ -3854,6 +3896,10 @@
           </a:solidFill>
           <a:ln/>
         </p:spPr>
+        <p:txBody>
+          <a:bodyPr/>
+          <a:p/>
+        </p:txBody>
       </p:sp>
       <p:sp>
         <p:nvSpPr>
@@ -3912,7 +3958,9 @@
           <a:ln/>
         </p:spPr>
         <p:txBody>
-          <a:bodyPr wrap="square" lIns="0" tIns="0" rIns="0" bIns="0" rtlCol="0" anchor="ctr"/>
+          <a:bodyPr wrap="square" lIns="0" tIns="0" rIns="0" bIns="0" rtlCol="0" anchor="ctr">
+            <a:normAutofit/>
+          </a:bodyPr>
           <a:lstStyle/>
           <a:p>
             <a:r>
@@ -3948,6 +3996,10 @@
           </a:solidFill>
           <a:ln/>
         </p:spPr>
+        <p:txBody>
+          <a:bodyPr/>
+          <a:p/>
+        </p:txBody>
       </p:sp>
       <p:sp>
         <p:nvSpPr>
@@ -4507,6 +4559,10 @@
           </a:solidFill>
           <a:ln/>
         </p:spPr>
+        <p:txBody>
+          <a:bodyPr/>
+          <a:p/>
+        </p:txBody>
       </p:sp>
       <p:sp>
         <p:nvSpPr>
@@ -4688,6 +4744,10 @@
             <a:prstDash val="solid"/>
           </a:ln>
         </p:spPr>
+        <p:txBody>
+          <a:bodyPr/>
+          <a:p/>
+        </p:txBody>
       </p:sp>
       <p:sp>
         <p:nvSpPr>
@@ -4708,6 +4768,10 @@
           </a:solidFill>
           <a:ln/>
         </p:spPr>
+        <p:txBody>
+          <a:bodyPr/>
+          <a:p/>
+        </p:txBody>
       </p:sp>
       <p:sp>
         <p:nvSpPr>
@@ -4766,7 +4830,9 @@
           <a:ln/>
         </p:spPr>
         <p:txBody>
-          <a:bodyPr wrap="square" lIns="0" tIns="0" rIns="0" bIns="0" rtlCol="0" anchor="ctr"/>
+          <a:bodyPr wrap="square" lIns="0" tIns="0" rIns="0" bIns="0" rtlCol="0" anchor="ctr">
+            <a:normAutofit/>
+          </a:bodyPr>
           <a:lstStyle/>
           <a:p>
             <a:r>
@@ -4802,6 +4868,10 @@
           </a:solidFill>
           <a:ln/>
         </p:spPr>
+        <p:txBody>
+          <a:bodyPr/>
+          <a:p/>
+        </p:txBody>
       </p:sp>
       <p:sp>
         <p:nvSpPr>
@@ -5361,6 +5431,10 @@
           </a:solidFill>
           <a:ln/>
         </p:spPr>
+        <p:txBody>
+          <a:bodyPr/>
+          <a:p/>
+        </p:txBody>
       </p:sp>
       <p:sp>
         <p:nvSpPr>
@@ -5459,6 +5533,10 @@
           </a:solidFill>
           <a:ln/>
         </p:spPr>
+        <p:txBody>
+          <a:bodyPr/>
+          <a:p/>
+        </p:txBody>
       </p:sp>
       <p:sp>
         <p:nvSpPr>
@@ -5479,6 +5557,10 @@
           </a:solidFill>
           <a:ln/>
         </p:spPr>
+        <p:txBody>
+          <a:bodyPr/>
+          <a:p/>
+        </p:txBody>
       </p:sp>
       <p:sp>
         <p:nvSpPr>
@@ -5537,7 +5619,9 @@
           <a:ln/>
         </p:spPr>
         <p:txBody>
-          <a:bodyPr wrap="square" lIns="0" tIns="0" rIns="0" bIns="0" rtlCol="0" anchor="ctr"/>
+          <a:bodyPr wrap="square" lIns="0" tIns="0" rIns="0" bIns="0" rtlCol="0" anchor="ctr">
+            <a:normAutofit/>
+          </a:bodyPr>
           <a:lstStyle/>
           <a:p>
             <a:r>
